--- a/modulo-05/05.04 - Visão Geral das SAP Fiori Tools/05.04_SAP_Fiori_tools.pptx
+++ b/modulo-05/05.04 - Visão Geral das SAP Fiori Tools/05.04_SAP_Fiori_tools.pptx
@@ -1639,7 +1639,7 @@
                   <a:srgbClr val="8FA3C7"/>
                 </a:solidFill>
               </a:rPr>
-              <a:t>ABAP Moderno · Módulo 03 — SAP Fiori Elements com OData V4  ·  Aula 4 de 11 — SAP Fiori Tools</a:t>
+              <a:t>ABAP Moderno · Módulo 05 — SAP Fiori Elements com OData V4  ·  Aula 4 de 11 — SAP Fiori Tools</a:t>
             </a:r>
             <a:endParaRPr lang="en-US" sz="900" dirty="0"/>
           </a:p>
@@ -1785,7 +1785,7 @@
                   <a:srgbClr val="556B82"/>
                 </a:solidFill>
               </a:rPr>
-              <a:t>ABAP Moderno · Módulo 03 — SAP Fiori Elements com OData V4  ·  Aula 4 de 11 — SAP Fiori Tools</a:t>
+              <a:t>ABAP Moderno · Módulo 05 — SAP Fiori Elements com OData V4  ·  Aula 4 de 11 — SAP Fiori Tools</a:t>
             </a:r>
             <a:endParaRPr lang="en-US" sz="900" dirty="0"/>
           </a:p>
@@ -2216,7 +2216,7 @@
                   <a:srgbClr val="89D1FF"/>
                 </a:solidFill>
               </a:rPr>
-              <a:t>MÓDULO 03 · AULA 04 DE 11</a:t>
+              <a:t>MÓDULO 05 · AULA 04 DE 11</a:t>
             </a:r>
             <a:endParaRPr lang="en-US" sz="1400" dirty="0"/>
           </a:p>
@@ -2646,7 +2646,7 @@
                   <a:srgbClr val="8FA3C7"/>
                 </a:solidFill>
               </a:rPr>
-              <a:t>ABAP Moderno · Módulo 03 — SAP Fiori Elements com OData V4 · Design System SAP Horizon</a:t>
+              <a:t>ABAP Moderno · Módulo 05 — SAP Fiori Elements com OData V4 · Design System SAP Horizon</a:t>
             </a:r>
             <a:endParaRPr lang="en-US" sz="1100" dirty="0"/>
           </a:p>
@@ -3168,7 +3168,7 @@
         </p:blipFill>
         <p:spPr>
           <a:xfrm>
-            <a:off x="850392" y="3036316"/>
+            <a:off x="8399069" y="3036316"/>
             <a:ext cx="256032" cy="256032"/>
           </a:xfrm>
           <a:prstGeom prst="rect">
@@ -3192,7 +3192,7 @@
         </p:blipFill>
         <p:spPr>
           <a:xfrm>
-            <a:off x="4624730" y="3036316"/>
+            <a:off x="850392" y="3036316"/>
             <a:ext cx="256032" cy="256032"/>
           </a:xfrm>
           <a:prstGeom prst="rect">
@@ -3216,7 +3216,7 @@
         </p:blipFill>
         <p:spPr>
           <a:xfrm>
-            <a:off x="8399069" y="3036316"/>
+            <a:off x="4624730" y="3036316"/>
             <a:ext cx="256032" cy="256032"/>
           </a:xfrm>
           <a:prstGeom prst="rect">
@@ -3879,8 +3879,8 @@
         </p:blipFill>
         <p:spPr>
           <a:xfrm>
-            <a:off x="6562192" y="2792063"/>
-            <a:ext cx="256032" cy="256032"/>
+            <a:off x="749808" y="4962049"/>
+            <a:ext cx="310896" cy="310896"/>
           </a:xfrm>
           <a:prstGeom prst="rect">
             <a:avLst/>
@@ -3927,8 +3927,8 @@
         </p:blipFill>
         <p:spPr>
           <a:xfrm>
-            <a:off x="749808" y="4962049"/>
-            <a:ext cx="310896" cy="310896"/>
+            <a:off x="6562192" y="2792063"/>
+            <a:ext cx="256032" cy="256032"/>
           </a:xfrm>
           <a:prstGeom prst="rect">
             <a:avLst/>
@@ -4071,7 +4071,7 @@
                   <a:srgbClr val="FFFFFF"/>
                 </a:solidFill>
               </a:rPr>
-              <a:t>O que aprendemos na aula 03.04</a:t>
+              <a:t>O que aprendemos na aula 05.04</a:t>
             </a:r>
             <a:endParaRPr lang="en-US" sz="3200" dirty="0"/>
           </a:p>
@@ -4301,7 +4301,7 @@
                   <a:srgbClr val="FFFFFF"/>
                 </a:solidFill>
               </a:rPr>
-              <a:t> cria o app Manage Travels com o template List Report Page</a:t>
+              <a:t> cria apps como o Pedidos de Compras com o template List Report Page</a:t>
             </a:r>
             <a:endParaRPr lang="en-US" sz="1400" dirty="0"/>
           </a:p>
@@ -4627,7 +4627,7 @@
                   <a:srgbClr val="89D1FF"/>
                 </a:solidFill>
               </a:rPr>
-              <a:t>Próxima aula · 03.05  </a:t>
+              <a:t>Próxima aula · 05.05  </a:t>
             </a:r>
             <a:r>
               <a:rPr lang="en-US" sz="1500" dirty="0">
@@ -4681,7 +4681,7 @@
         </p:blipFill>
         <p:spPr>
           <a:xfrm>
-            <a:off x="822960" y="2926080"/>
+            <a:off x="6355080" y="1965960"/>
             <a:ext cx="256032" cy="256032"/>
           </a:xfrm>
           <a:prstGeom prst="rect">
@@ -4705,7 +4705,7 @@
         </p:blipFill>
         <p:spPr>
           <a:xfrm>
-            <a:off x="6355080" y="1965960"/>
+            <a:off x="822960" y="2926080"/>
             <a:ext cx="256032" cy="256032"/>
           </a:xfrm>
           <a:prstGeom prst="rect">
@@ -4729,7 +4729,7 @@
         </p:blipFill>
         <p:spPr>
           <a:xfrm>
-            <a:off x="6355080" y="2926080"/>
+            <a:off x="822960" y="3886200"/>
             <a:ext cx="256032" cy="256032"/>
           </a:xfrm>
           <a:prstGeom prst="rect">
@@ -4753,7 +4753,7 @@
         </p:blipFill>
         <p:spPr>
           <a:xfrm>
-            <a:off x="6355080" y="3886200"/>
+            <a:off x="6355080" y="2926080"/>
             <a:ext cx="256032" cy="256032"/>
           </a:xfrm>
           <a:prstGeom prst="rect">
@@ -4777,8 +4777,8 @@
         </p:blipFill>
         <p:spPr>
           <a:xfrm>
-            <a:off x="960120" y="5541264"/>
-            <a:ext cx="365760" cy="365760"/>
+            <a:off x="6355080" y="3886200"/>
+            <a:ext cx="256032" cy="256032"/>
           </a:xfrm>
           <a:prstGeom prst="rect">
             <a:avLst/>
@@ -4801,8 +4801,8 @@
         </p:blipFill>
         <p:spPr>
           <a:xfrm>
-            <a:off x="822960" y="3886200"/>
-            <a:ext cx="256032" cy="256032"/>
+            <a:off x="960120" y="5541264"/>
+            <a:ext cx="365760" cy="365760"/>
           </a:xfrm>
           <a:prstGeom prst="rect">
             <a:avLst/>
@@ -4904,7 +4904,7 @@
                   <a:srgbClr val="1D2D3E"/>
                 </a:solidFill>
               </a:rPr>
-              <a:t>Módulo 03 em 11 aulas: Fiori Elements com OData V4</a:t>
+              <a:t>Módulo 05 em 11 aulas: Fiori Elements com OData V4</a:t>
             </a:r>
             <a:endParaRPr lang="en-US" sz="2800" dirty="0"/>
           </a:p>
@@ -6774,7 +6774,7 @@
                   <a:srgbClr val="1D2D3E"/>
                 </a:solidFill>
               </a:rPr>
-              <a:t>geramos o app Manage Travels sobre o serviço OData V4 e conhecemos as ferramentas que configuram o app sem escrever código.</a:t>
+              <a:t>vemos como o app Pedidos de Compras nasce sobre o serviço OData V4 e conhecemos as ferramentas que configuram o app sem escrever código.</a:t>
             </a:r>
             <a:endParaRPr lang="en-US" sz="1400" dirty="0"/>
           </a:p>
@@ -6796,7 +6796,7 @@
         </p:blipFill>
         <p:spPr>
           <a:xfrm>
-            <a:off x="1696669" y="1847088"/>
+            <a:off x="3576218" y="1847088"/>
             <a:ext cx="347472" cy="347472"/>
           </a:xfrm>
           <a:prstGeom prst="rect">
@@ -6820,7 +6820,7 @@
         </p:blipFill>
         <p:spPr>
           <a:xfrm>
-            <a:off x="3576218" y="1847088"/>
+            <a:off x="1696669" y="1847088"/>
             <a:ext cx="347472" cy="347472"/>
           </a:xfrm>
           <a:prstGeom prst="rect">
@@ -6868,7 +6868,7 @@
         </p:blipFill>
         <p:spPr>
           <a:xfrm>
-            <a:off x="7335317" y="1847088"/>
+            <a:off x="11094415" y="1847088"/>
             <a:ext cx="347472" cy="347472"/>
           </a:xfrm>
           <a:prstGeom prst="rect">
@@ -6892,7 +6892,7 @@
         </p:blipFill>
         <p:spPr>
           <a:xfrm>
-            <a:off x="9214866" y="1847088"/>
+            <a:off x="7335317" y="1847088"/>
             <a:ext cx="347472" cy="347472"/>
           </a:xfrm>
           <a:prstGeom prst="rect">
@@ -6916,7 +6916,7 @@
         </p:blipFill>
         <p:spPr>
           <a:xfrm>
-            <a:off x="11094415" y="1847088"/>
+            <a:off x="9214866" y="1847088"/>
             <a:ext cx="347472" cy="347472"/>
           </a:xfrm>
           <a:prstGeom prst="rect">
@@ -6940,7 +6940,7 @@
         </p:blipFill>
         <p:spPr>
           <a:xfrm>
-            <a:off x="1696669" y="3858768"/>
+            <a:off x="3576218" y="3858768"/>
             <a:ext cx="347472" cy="347472"/>
           </a:xfrm>
           <a:prstGeom prst="rect">
@@ -6964,7 +6964,7 @@
         </p:blipFill>
         <p:spPr>
           <a:xfrm>
-            <a:off x="3576218" y="3858768"/>
+            <a:off x="1696669" y="3858768"/>
             <a:ext cx="347472" cy="347472"/>
           </a:xfrm>
           <a:prstGeom prst="rect">
@@ -7851,7 +7851,7 @@
         </p:blipFill>
         <p:spPr>
           <a:xfrm>
-            <a:off x="3114995" y="3330321"/>
+            <a:off x="5379598" y="3330321"/>
             <a:ext cx="256032" cy="256032"/>
           </a:xfrm>
           <a:prstGeom prst="rect">
@@ -7875,7 +7875,7 @@
         </p:blipFill>
         <p:spPr>
           <a:xfrm>
-            <a:off x="5379598" y="3330321"/>
+            <a:off x="3114995" y="3330321"/>
             <a:ext cx="256032" cy="256032"/>
           </a:xfrm>
           <a:prstGeom prst="rect">
@@ -8053,7 +8053,7 @@
                   <a:srgbClr val="89D1FF"/>
                 </a:solidFill>
               </a:rPr>
-              <a:t>AULA 03.04 · SEÇÃO 1</a:t>
+              <a:t>AULA 05.04 · SEÇÃO 1</a:t>
             </a:r>
             <a:endParaRPr lang="en-US" sz="1300" dirty="0"/>
           </a:p>
@@ -9229,7 +9229,7 @@
                   <a:srgbClr val="89D1FF"/>
                 </a:solidFill>
               </a:rPr>
-              <a:t>AULA 03.04 · SEÇÃO 2</a:t>
+              <a:t>AULA 05.04 · SEÇÃO 2</a:t>
             </a:r>
             <a:endParaRPr lang="en-US" sz="1300" dirty="0"/>
           </a:p>
@@ -9485,7 +9485,7 @@
                   <a:srgbClr val="D1EFFF"/>
                 </a:solidFill>
               </a:rPr>
-              <a:t>  ZUI_FE_TRAVEL_…_O4</a:t>
+              <a:t>  ZUI_PC_PEDIDOS_COMPRAS_O4</a:t>
             </a:r>
             <a:endParaRPr lang="en-US" sz="1400" dirty="0"/>
           </a:p>
@@ -9532,7 +9532,7 @@
                   <a:srgbClr val="D1EFFF"/>
                 </a:solidFill>
               </a:rPr>
-              <a:t>  Travel</a:t>
+              <a:t>  Pedido</a:t>
             </a:r>
             <a:endParaRPr lang="en-US" sz="1400" dirty="0"/>
           </a:p>
@@ -9666,7 +9666,7 @@
                   <a:srgbClr val="0064D9"/>
                 </a:solidFill>
               </a:rPr>
-              <a:t>GERADOR · EXERCÍCIO DO CURSO</a:t>
+              <a:t>GERADOR · NO PROJETO</a:t>
             </a:r>
             <a:endParaRPr lang="en-US" sz="1100" dirty="0"/>
           </a:p>
@@ -9704,7 +9704,7 @@
                   <a:srgbClr val="1D2D3E"/>
                 </a:solidFill>
               </a:rPr>
-              <a:t>Criando o app Manage Travels</a:t>
+              <a:t>Criando o app Pedidos de Compras</a:t>
             </a:r>
             <a:endParaRPr lang="en-US" sz="2800" dirty="0"/>
           </a:p>
@@ -10064,7 +10064,7 @@
                 <a:ea typeface="Courier New" pitchFamily="34" charset="-122"/>
                 <a:cs typeface="Courier New" pitchFamily="34" charset="-120"/>
               </a:rPr>
-              <a:t>ZUI_FE_TRAVEL_######_O4</a:t>
+              <a:t>ZUI_PC_PEDIDOS_COMPRAS_O4</a:t>
             </a:r>
             <a:r>
               <a:rPr lang="en-US" sz="1150" dirty="0">
@@ -10223,7 +10223,7 @@
                   <a:srgbClr val="556B82"/>
                 </a:solidFill>
               </a:rPr>
-              <a:t>Travel</a:t>
+              <a:t>Pedido</a:t>
             </a:r>
             <a:r>
               <a:rPr lang="en-US" sz="1150" dirty="0">
@@ -10231,7 +10231,7 @@
                   <a:srgbClr val="556B82"/>
                 </a:solidFill>
               </a:rPr>
-              <a:t> e, opcionalmente, a navegação para </a:t>
+              <a:t> e a navegação para os </a:t>
             </a:r>
             <a:r>
               <a:rPr lang="en-US" sz="1150" b="1" dirty="0">
@@ -10239,7 +10239,7 @@
                   <a:srgbClr val="556B82"/>
                 </a:solidFill>
               </a:rPr>
-              <a:t>Booking</a:t>
+              <a:t>Itens</a:t>
             </a:r>
             <a:r>
               <a:rPr lang="en-US" sz="1150" dirty="0">
@@ -10247,7 +10247,26 @@
                   <a:srgbClr val="556B82"/>
                 </a:solidFill>
               </a:rPr>
-              <a:t>.</a:t>
+              <a:t> (</a:t>
+            </a:r>
+            <a:r>
+              <a:rPr lang="en-US" sz="1150" dirty="0">
+                <a:solidFill>
+                  <a:srgbClr val="0064D9"/>
+                </a:solidFill>
+                <a:latin typeface="Courier New" pitchFamily="34" charset="0"/>
+                <a:ea typeface="Courier New" pitchFamily="34" charset="-122"/>
+                <a:cs typeface="Courier New" pitchFamily="34" charset="-120"/>
+              </a:rPr>
+              <a:t>_Itens</a:t>
+            </a:r>
+            <a:r>
+              <a:rPr lang="en-US" sz="1150" dirty="0">
+                <a:solidFill>
+                  <a:srgbClr val="556B82"/>
+                </a:solidFill>
+              </a:rPr>
+              <a:t>).</a:t>
             </a:r>
             <a:endParaRPr lang="en-US" sz="1400" dirty="0"/>
           </a:p>
@@ -10787,7 +10806,7 @@
                   <a:srgbClr val="9DA5B4"/>
                 </a:solidFill>
               </a:rPr>
-              <a:t>travels › webapp</a:t>
+              <a:t>ui5/apps-list-reports/pedidos-compras › webapp (trecho)</a:t>
             </a:r>
             <a:endParaRPr lang="en-US" sz="850" dirty="0"/>
           </a:p>
@@ -11242,7 +11261,7 @@
                 <a:ea typeface="Courier New" pitchFamily="34" charset="-122"/>
                 <a:cs typeface="Courier New" pitchFamily="34" charset="-120"/>
               </a:rPr>
-              <a:t>"TravelList": {</a:t>
+              <a:t>"PedidoList": {</a:t>
             </a:r>
             <a:endParaRPr lang="en-US" sz="950" dirty="0"/>
           </a:p>
@@ -11366,7 +11385,7 @@
                 <a:ea typeface="Courier New" pitchFamily="34" charset="-122"/>
                 <a:cs typeface="Courier New" pitchFamily="34" charset="-120"/>
               </a:rPr>
-              <a:t>"contextPath": "/Travel",</a:t>
+              <a:t>"contextPath": "/Pedido",</a:t>
             </a:r>
             <a:endParaRPr lang="en-US" sz="950" dirty="0"/>
           </a:p>
@@ -11459,7 +11478,7 @@
                 <a:ea typeface="Courier New" pitchFamily="34" charset="-122"/>
                 <a:cs typeface="Courier New" pitchFamily="34" charset="-120"/>
               </a:rPr>
-              <a:t>"Travel": { "detail": { "route": "TravelObjectPage" } }</a:t>
+              <a:t>"Pedido": { "detail": { "route": "PedidoObjectPage" } }</a:t>
             </a:r>
             <a:endParaRPr lang="en-US" sz="950" dirty="0"/>
           </a:p>
@@ -11616,7 +11635,7 @@
                 <a:ea typeface="Courier New" pitchFamily="34" charset="-122"/>
                 <a:cs typeface="Courier New" pitchFamily="34" charset="-120"/>
               </a:rPr>
-              <a:t>"TravelObjectPage": {</a:t>
+              <a:t>"PedidoObjectPage": {</a:t>
             </a:r>
             <a:endParaRPr lang="en-US" sz="950" dirty="0"/>
           </a:p>
@@ -11709,7 +11728,7 @@
                 <a:ea typeface="Courier New" pitchFamily="34" charset="-122"/>
                 <a:cs typeface="Courier New" pitchFamily="34" charset="-120"/>
               </a:rPr>
-              <a:t>"options": { "settings": { "contextPath": "/Travel" } }</a:t>
+              <a:t>"options": { "settings": { "contextPath": "/Pedido" } }</a:t>
             </a:r>
             <a:endParaRPr lang="en-US" sz="950" dirty="0"/>
           </a:p>
@@ -12394,7 +12413,7 @@
                   <a:srgbClr val="89D1FF"/>
                 </a:solidFill>
               </a:rPr>
-              <a:t>AULA 03.04 · SEÇÃO 3</a:t>
+              <a:t>AULA 05.04 · SEÇÃO 3</a:t>
             </a:r>
             <a:endParaRPr lang="en-US" sz="1300" dirty="0"/>
           </a:p>
